--- a/Mentorship/files/Assignments/MachineLearning/Algorithms_MachineLearning.pptx
+++ b/Mentorship/files/Assignments/MachineLearning/Algorithms_MachineLearning.pptx
@@ -5,7 +5,7 @@
     <p:sldMasterId id="2147483648" r:id="rId4"/>
   </p:sldMasterIdLst>
   <p:notesMasterIdLst>
-    <p:notesMasterId r:id="rId24"/>
+    <p:notesMasterId r:id="rId26"/>
   </p:notesMasterIdLst>
   <p:sldIdLst>
     <p:sldId id="388" r:id="rId5"/>
@@ -26,7 +26,9 @@
     <p:sldId id="760" r:id="rId20"/>
     <p:sldId id="761" r:id="rId21"/>
     <p:sldId id="762" r:id="rId22"/>
-    <p:sldId id="417" r:id="rId23"/>
+    <p:sldId id="763" r:id="rId23"/>
+    <p:sldId id="764" r:id="rId24"/>
+    <p:sldId id="417" r:id="rId25"/>
   </p:sldIdLst>
   <p:sldSz cx="12192000" cy="6858000"/>
   <p:notesSz cx="6858000" cy="9144000"/>
@@ -658,7 +660,7 @@
           <a:p>
             <a:fld id="{70BA6B9A-231B-4557-80D9-4035CB160C23}" type="slidenum">
               <a:rPr lang="en-US" smtClean="0"/>
-              <a:t>19</a:t>
+              <a:t>21</a:t>
             </a:fld>
             <a:endParaRPr lang="en-US"/>
           </a:p>
@@ -5555,13 +5557,7 @@
   <p:cSld>
     <p:spTree>
       <p:nvGrpSpPr>
-        <p:cNvPr id="1" name="">
-          <a:extLst>
-            <a:ext uri="{FF2B5EF4-FFF2-40B4-BE49-F238E27FC236}">
-              <a16:creationId xmlns:a16="http://schemas.microsoft.com/office/drawing/2014/main" id="{6DB1F6F2-261D-491B-C5E0-10CA131C73B3}"/>
-            </a:ext>
-          </a:extLst>
-        </p:cNvPr>
+        <p:cNvPr id="1" name=""/>
         <p:cNvGrpSpPr/>
         <p:nvPr/>
       </p:nvGrpSpPr>
@@ -5573,39 +5569,147 @@
           <a:chExt cx="0" cy="0"/>
         </a:xfrm>
       </p:grpSpPr>
-      <p:pic>
-        <p:nvPicPr>
-          <p:cNvPr id="7" name="Content Placeholder 6" descr="A close-up of a logo&#10;&#10;Description automatically generated">
-            <a:extLst>
-              <a:ext uri="{FF2B5EF4-FFF2-40B4-BE49-F238E27FC236}">
-                <a16:creationId xmlns:a16="http://schemas.microsoft.com/office/drawing/2014/main" id="{FB351B36-1391-0EB0-72B5-BD501480AE12}"/>
-              </a:ext>
-            </a:extLst>
-          </p:cNvPr>
-          <p:cNvPicPr>
-            <a:picLocks noGrp="1" noChangeAspect="1"/>
-          </p:cNvPicPr>
+      <p:sp>
+        <p:nvSpPr>
+          <p:cNvPr id="2" name="Title 1">
+            <a:extLst>
+              <a:ext uri="{FF2B5EF4-FFF2-40B4-BE49-F238E27FC236}">
+                <a16:creationId xmlns:a16="http://schemas.microsoft.com/office/drawing/2014/main" id="{E2BE1304-2966-4E12-E9E3-FE810D832D7E}"/>
+              </a:ext>
+            </a:extLst>
+          </p:cNvPr>
+          <p:cNvSpPr>
+            <a:spLocks noGrp="1"/>
+          </p:cNvSpPr>
+          <p:nvPr>
+            <p:ph type="title"/>
+          </p:nvPr>
+        </p:nvSpPr>
+        <p:spPr/>
+        <p:txBody>
+          <a:bodyPr/>
+          <a:lstStyle/>
+          <a:p>
+            <a:r>
+              <a:rPr lang="en-US" dirty="0"/>
+              <a:t>Hyperparameter Tuning</a:t>
+            </a:r>
+          </a:p>
+        </p:txBody>
+      </p:sp>
+      <p:sp>
+        <p:nvSpPr>
+          <p:cNvPr id="3" name="Content Placeholder 2">
+            <a:extLst>
+              <a:ext uri="{FF2B5EF4-FFF2-40B4-BE49-F238E27FC236}">
+                <a16:creationId xmlns:a16="http://schemas.microsoft.com/office/drawing/2014/main" id="{CA5011CB-3393-CBA8-765B-65E66FFA1881}"/>
+              </a:ext>
+            </a:extLst>
+          </p:cNvPr>
+          <p:cNvSpPr>
+            <a:spLocks noGrp="1"/>
+          </p:cNvSpPr>
           <p:nvPr>
             <p:ph idx="1"/>
           </p:nvPr>
-        </p:nvPicPr>
-        <p:blipFill>
-          <a:blip r:embed="rId3"/>
-          <a:stretch>
-            <a:fillRect/>
-          </a:stretch>
-        </p:blipFill>
-        <p:spPr>
-          <a:xfrm>
-            <a:off x="3966156" y="2674961"/>
-            <a:ext cx="5137279" cy="1727994"/>
-          </a:xfrm>
-        </p:spPr>
-      </p:pic>
+        </p:nvSpPr>
+        <p:spPr/>
+        <p:txBody>
+          <a:bodyPr>
+            <a:normAutofit fontScale="55000" lnSpcReduction="20000"/>
+          </a:bodyPr>
+          <a:lstStyle/>
+          <a:p>
+            <a:pPr fontAlgn="ctr"/>
+            <a:r>
+              <a:rPr lang="en-US" dirty="0"/>
+              <a:t>Hyperparameters are configuration variables that control the learning process of a machine learning model. </a:t>
+            </a:r>
+          </a:p>
+          <a:p>
+            <a:pPr fontAlgn="ctr"/>
+            <a:r>
+              <a:rPr lang="en-US" dirty="0"/>
+              <a:t>Unlike model parameters (like coefficients in a linear model) which are learned from the data, hyperparameters are set by the user before training. </a:t>
+            </a:r>
+          </a:p>
+          <a:p>
+            <a:pPr fontAlgn="ctr"/>
+            <a:r>
+              <a:rPr lang="en-US" dirty="0"/>
+              <a:t>Examples of hyperparameters include: </a:t>
+            </a:r>
+          </a:p>
+          <a:p>
+            <a:pPr fontAlgn="ctr"/>
+            <a:r>
+              <a:rPr lang="en-US" dirty="0"/>
+              <a:t>Learning rate in neural networks. </a:t>
+            </a:r>
+          </a:p>
+          <a:p>
+            <a:pPr fontAlgn="ctr"/>
+            <a:r>
+              <a:rPr lang="en-US" dirty="0"/>
+              <a:t>Number of hidden layers and nodes in a neural network. </a:t>
+            </a:r>
+          </a:p>
+          <a:p>
+            <a:pPr fontAlgn="ctr"/>
+            <a:r>
+              <a:rPr lang="en-US" dirty="0"/>
+              <a:t>Regularization parameters (e.g., L1, L2). </a:t>
+            </a:r>
+          </a:p>
+          <a:p>
+            <a:pPr fontAlgn="ctr"/>
+            <a:r>
+              <a:rPr lang="en-US" dirty="0"/>
+              <a:t>Batch size in training. </a:t>
+            </a:r>
+          </a:p>
+          <a:p>
+            <a:pPr fontAlgn="ctr"/>
+            <a:r>
+              <a:rPr lang="en-US" dirty="0"/>
+              <a:t>Number of trees in a random forest. </a:t>
+            </a:r>
+          </a:p>
+          <a:p>
+            <a:r>
+              <a:rPr lang="en-US" dirty="0"/>
+              <a:t>Why is Hyperparameter Tuning Important?</a:t>
+            </a:r>
+          </a:p>
+          <a:p>
+            <a:pPr fontAlgn="ctr"/>
+            <a:r>
+              <a:rPr lang="en-US" dirty="0"/>
+              <a:t>Hyperparameters directly influence how a model learns, its complexity, and its ability to generalize to new data. </a:t>
+            </a:r>
+          </a:p>
+          <a:p>
+            <a:pPr fontAlgn="ctr"/>
+            <a:r>
+              <a:rPr lang="en-US" dirty="0"/>
+              <a:t>Finding the right hyperparameter values can significantly improve a model's accuracy, efficiency, and overall performance. </a:t>
+            </a:r>
+          </a:p>
+          <a:p>
+            <a:r>
+              <a:rPr lang="en-US" dirty="0"/>
+              <a:t>Poorly tuned hyperparameters can lead to underfitting (model is too simple) or overfitting (model is too complex). </a:t>
+            </a:r>
+          </a:p>
+          <a:p>
+            <a:endParaRPr lang="en-US" dirty="0"/>
+          </a:p>
+        </p:txBody>
+      </p:sp>
     </p:spTree>
     <p:extLst>
       <p:ext uri="{BB962C8B-B14F-4D97-AF65-F5344CB8AC3E}">
-        <p14:creationId xmlns:p14="http://schemas.microsoft.com/office/powerpoint/2010/main" val="151120145"/>
+        <p14:creationId xmlns:p14="http://schemas.microsoft.com/office/powerpoint/2010/main" val="1343976765"/>
       </p:ext>
     </p:extLst>
   </p:cSld>
@@ -5692,6 +5796,214 @@
     <p:extLst>
       <p:ext uri="{BB962C8B-B14F-4D97-AF65-F5344CB8AC3E}">
         <p14:creationId xmlns:p14="http://schemas.microsoft.com/office/powerpoint/2010/main" val="2289239775"/>
+      </p:ext>
+    </p:extLst>
+  </p:cSld>
+  <p:clrMapOvr>
+    <a:masterClrMapping/>
+  </p:clrMapOvr>
+</p:sld>
+</file>
+
+<file path=ppt/slides/slide20.xml><?xml version="1.0" encoding="utf-8"?>
+<p:sld xmlns:a="http://schemas.openxmlformats.org/drawingml/2006/main" xmlns:r="http://schemas.openxmlformats.org/officeDocument/2006/relationships" xmlns:p="http://schemas.openxmlformats.org/presentationml/2006/main">
+  <p:cSld>
+    <p:spTree>
+      <p:nvGrpSpPr>
+        <p:cNvPr id="1" name=""/>
+        <p:cNvGrpSpPr/>
+        <p:nvPr/>
+      </p:nvGrpSpPr>
+      <p:grpSpPr>
+        <a:xfrm>
+          <a:off x="0" y="0"/>
+          <a:ext cx="0" cy="0"/>
+          <a:chOff x="0" y="0"/>
+          <a:chExt cx="0" cy="0"/>
+        </a:xfrm>
+      </p:grpSpPr>
+      <p:sp>
+        <p:nvSpPr>
+          <p:cNvPr id="2" name="Title 1">
+            <a:extLst>
+              <a:ext uri="{FF2B5EF4-FFF2-40B4-BE49-F238E27FC236}">
+                <a16:creationId xmlns:a16="http://schemas.microsoft.com/office/drawing/2014/main" id="{37649736-98C2-CEB7-DFDA-D2765297F420}"/>
+              </a:ext>
+            </a:extLst>
+          </p:cNvPr>
+          <p:cNvSpPr>
+            <a:spLocks noGrp="1"/>
+          </p:cNvSpPr>
+          <p:nvPr>
+            <p:ph type="title"/>
+          </p:nvPr>
+        </p:nvSpPr>
+        <p:spPr/>
+        <p:txBody>
+          <a:bodyPr/>
+          <a:lstStyle/>
+          <a:p>
+            <a:r>
+              <a:rPr lang="en-US" dirty="0"/>
+              <a:t>Hyperparameter Tuning</a:t>
+            </a:r>
+          </a:p>
+        </p:txBody>
+      </p:sp>
+      <p:sp>
+        <p:nvSpPr>
+          <p:cNvPr id="3" name="Content Placeholder 2">
+            <a:extLst>
+              <a:ext uri="{FF2B5EF4-FFF2-40B4-BE49-F238E27FC236}">
+                <a16:creationId xmlns:a16="http://schemas.microsoft.com/office/drawing/2014/main" id="{EF6F933D-ECEA-43C0-E70A-70A52AB2925E}"/>
+              </a:ext>
+            </a:extLst>
+          </p:cNvPr>
+          <p:cNvSpPr>
+            <a:spLocks noGrp="1"/>
+          </p:cNvSpPr>
+          <p:nvPr>
+            <p:ph idx="1"/>
+          </p:nvPr>
+        </p:nvSpPr>
+        <p:spPr/>
+        <p:txBody>
+          <a:bodyPr>
+            <a:normAutofit fontScale="92500" lnSpcReduction="10000"/>
+          </a:bodyPr>
+          <a:lstStyle/>
+          <a:p>
+            <a:r>
+              <a:rPr lang="en-US" dirty="0"/>
+              <a:t>Hyperparameters are configuration variables that control the learning process of a machine learning model </a:t>
+            </a:r>
+          </a:p>
+          <a:p>
+            <a:r>
+              <a:rPr lang="en-US" dirty="0"/>
+              <a:t>Hyperparameters are set by the user before training </a:t>
+            </a:r>
+          </a:p>
+          <a:p>
+            <a:r>
+              <a:rPr lang="en-US" dirty="0"/>
+              <a:t>Examples of hyperparameters </a:t>
+            </a:r>
+          </a:p>
+          <a:p>
+            <a:pPr lvl="1"/>
+            <a:r>
+              <a:rPr lang="en-US" dirty="0"/>
+              <a:t>Batch size in training </a:t>
+            </a:r>
+          </a:p>
+          <a:p>
+            <a:pPr lvl="1"/>
+            <a:r>
+              <a:rPr lang="en-US" dirty="0"/>
+              <a:t>Number of trees in a random forest</a:t>
+            </a:r>
+          </a:p>
+          <a:p>
+            <a:r>
+              <a:rPr lang="en-US" dirty="0"/>
+              <a:t>Hyperparameters directly influence how a model learns, its complexity, and its ability to generate new data</a:t>
+            </a:r>
+          </a:p>
+          <a:p>
+            <a:pPr lvl="1"/>
+            <a:r>
+              <a:rPr lang="en-US" dirty="0"/>
+              <a:t>Finding the right hyperparameter values can significantly improve a model’s accuracy, efficiency, and overall performance. </a:t>
+            </a:r>
+          </a:p>
+          <a:p>
+            <a:pPr lvl="1"/>
+            <a:r>
+              <a:rPr lang="en-US" dirty="0"/>
+              <a:t>Models that are not hyper tuned well can lead to underfitting (model that is too simple) or overfitting (model that is </a:t>
+            </a:r>
+            <a:r>
+              <a:rPr lang="en-US"/>
+              <a:t>too complex) </a:t>
+            </a:r>
+            <a:endParaRPr lang="en-US" dirty="0"/>
+          </a:p>
+          <a:p>
+            <a:pPr lvl="1"/>
+            <a:endParaRPr lang="en-US" dirty="0"/>
+          </a:p>
+        </p:txBody>
+      </p:sp>
+    </p:spTree>
+    <p:extLst>
+      <p:ext uri="{BB962C8B-B14F-4D97-AF65-F5344CB8AC3E}">
+        <p14:creationId xmlns:p14="http://schemas.microsoft.com/office/powerpoint/2010/main" val="2606208197"/>
+      </p:ext>
+    </p:extLst>
+  </p:cSld>
+  <p:clrMapOvr>
+    <a:masterClrMapping/>
+  </p:clrMapOvr>
+</p:sld>
+</file>
+
+<file path=ppt/slides/slide21.xml><?xml version="1.0" encoding="utf-8"?>
+<p:sld xmlns:a="http://schemas.openxmlformats.org/drawingml/2006/main" xmlns:r="http://schemas.openxmlformats.org/officeDocument/2006/relationships" xmlns:p="http://schemas.openxmlformats.org/presentationml/2006/main">
+  <p:cSld>
+    <p:spTree>
+      <p:nvGrpSpPr>
+        <p:cNvPr id="1" name="">
+          <a:extLst>
+            <a:ext uri="{FF2B5EF4-FFF2-40B4-BE49-F238E27FC236}">
+              <a16:creationId xmlns:a16="http://schemas.microsoft.com/office/drawing/2014/main" id="{6DB1F6F2-261D-491B-C5E0-10CA131C73B3}"/>
+            </a:ext>
+          </a:extLst>
+        </p:cNvPr>
+        <p:cNvGrpSpPr/>
+        <p:nvPr/>
+      </p:nvGrpSpPr>
+      <p:grpSpPr>
+        <a:xfrm>
+          <a:off x="0" y="0"/>
+          <a:ext cx="0" cy="0"/>
+          <a:chOff x="0" y="0"/>
+          <a:chExt cx="0" cy="0"/>
+        </a:xfrm>
+      </p:grpSpPr>
+      <p:pic>
+        <p:nvPicPr>
+          <p:cNvPr id="7" name="Content Placeholder 6" descr="A close-up of a logo&#10;&#10;Description automatically generated">
+            <a:extLst>
+              <a:ext uri="{FF2B5EF4-FFF2-40B4-BE49-F238E27FC236}">
+                <a16:creationId xmlns:a16="http://schemas.microsoft.com/office/drawing/2014/main" id="{FB351B36-1391-0EB0-72B5-BD501480AE12}"/>
+              </a:ext>
+            </a:extLst>
+          </p:cNvPr>
+          <p:cNvPicPr>
+            <a:picLocks noGrp="1" noChangeAspect="1"/>
+          </p:cNvPicPr>
+          <p:nvPr>
+            <p:ph idx="1"/>
+          </p:nvPr>
+        </p:nvPicPr>
+        <p:blipFill>
+          <a:blip r:embed="rId3"/>
+          <a:stretch>
+            <a:fillRect/>
+          </a:stretch>
+        </p:blipFill>
+        <p:spPr>
+          <a:xfrm>
+            <a:off x="3966156" y="2674961"/>
+            <a:ext cx="5137279" cy="1727994"/>
+          </a:xfrm>
+        </p:spPr>
+      </p:pic>
+    </p:spTree>
+    <p:extLst>
+      <p:ext uri="{BB962C8B-B14F-4D97-AF65-F5344CB8AC3E}">
+        <p14:creationId xmlns:p14="http://schemas.microsoft.com/office/powerpoint/2010/main" val="151120145"/>
       </p:ext>
     </p:extLst>
   </p:cSld>
